--- a/brand/flex-recruiting-pitch.pptx
+++ b/brand/flex-recruiting-pitch.pptx
@@ -112,18 +112,18 @@
   <p:extLst>
     <p:ext uri="{521415D9-36F7-43E2-AB2F-B90AF26B5E84}">
       <p14:sectionLst xmlns:p14="http://schemas.microsoft.com/office/powerpoint/2010/main">
-        <p14:section name="Cover" id="{ba80c7e8-eafa-9bf4-dee0-52bfba00ddd1}">
+        <p14:section name="Cover" id="{9d4e28aa-3401-c0dd-c4c6-d1dddf777c7f}">
           <p14:sldIdLst>
             <p14:sldId id="256"/>
           </p14:sldIdLst>
         </p14:section>
-        <p14:section name="Who" id="{dab66504-51ef-0c4e-3788-545b6bbc5e60}">
+        <p14:section name="Who" id="{4f384560-bda6-bd5e-81d4-ba495583c6ba}">
           <p14:sldIdLst>
             <p14:sldId id="257"/>
             <p14:sldId id="258"/>
           </p14:sldIdLst>
         </p14:section>
-        <p14:section name="Role" id="{ac768ce5-dd72-ff94-df24-6a3ff7af029f}">
+        <p14:section name="Role" id="{20bf2dc6-c8aa-0846-f79b-49b9e6d23f49}">
           <p14:sldIdLst>
             <p14:sldId id="259"/>
             <p14:sldId id="260"/>
@@ -1087,7 +1087,7 @@
         <p:spPr>
           <a:xfrm>
             <a:off x="658368" y="548640"/>
-            <a:ext cx="2292401" cy="726948"/>
+            <a:ext cx="2104949" cy="726948"/>
           </a:xfrm>
           <a:prstGeom prst="rect">
             <a:avLst/>
@@ -1358,7 +1358,7 @@
         <p:spPr>
           <a:xfrm>
             <a:off x="10332720" y="5852160"/>
-            <a:ext cx="1294790" cy="410566"/>
+            <a:ext cx="1188720" cy="410566"/>
           </a:xfrm>
           <a:prstGeom prst="rect">
             <a:avLst/>
@@ -1512,7 +1512,7 @@
         <p:spPr>
           <a:xfrm>
             <a:off x="10716768" y="6053328"/>
-            <a:ext cx="946404" cy="299923"/>
+            <a:ext cx="868680" cy="299923"/>
           </a:xfrm>
           <a:prstGeom prst="rect">
             <a:avLst/>
@@ -1646,7 +1646,7 @@
         <p:spPr>
           <a:xfrm>
             <a:off x="10716768" y="6053328"/>
-            <a:ext cx="946404" cy="299923"/>
+            <a:ext cx="868680" cy="299923"/>
           </a:xfrm>
           <a:prstGeom prst="rect">
             <a:avLst/>
@@ -1819,7 +1819,7 @@
         <p:spPr>
           <a:xfrm>
             <a:off x="10332720" y="5760720"/>
-            <a:ext cx="1294790" cy="410566"/>
+            <a:ext cx="1188720" cy="410566"/>
           </a:xfrm>
           <a:prstGeom prst="rect">
             <a:avLst/>
